--- a/2026/Optimal Control/Project/Presentation.pptx
+++ b/2026/Optimal Control/Project/Presentation.pptx
@@ -6368,8 +6368,8 @@
           </a:p>
         </p:txBody>
       </p:sp>
-      <mc:AlternateContent xmlns:mc="http://schemas.openxmlformats.org/markup-compatibility/2006">
-        <mc:Choice xmlns:a14="http://schemas.microsoft.com/office/drawing/2010/main" Requires="a14">
+      <mc:AlternateContent xmlns:mc="http://schemas.openxmlformats.org/markup-compatibility/2006" xmlns:a14="http://schemas.microsoft.com/office/drawing/2010/main">
+        <mc:Choice Requires="a14">
           <p:sp>
             <p:nvSpPr>
               <p:cNvPr id="3" name="Content Placeholder 2">
@@ -6569,7 +6569,7 @@
             </p:txBody>
           </p:sp>
         </mc:Choice>
-        <mc:Fallback>
+        <mc:Fallback xmlns="">
           <p:sp>
             <p:nvSpPr>
               <p:cNvPr id="3" name="Content Placeholder 2">
@@ -10238,8 +10238,8 @@
           </a:p>
         </p:txBody>
       </p:sp>
-      <mc:AlternateContent xmlns:mc="http://schemas.openxmlformats.org/markup-compatibility/2006">
-        <mc:Choice xmlns:a14="http://schemas.microsoft.com/office/drawing/2010/main" Requires="a14">
+      <mc:AlternateContent xmlns:mc="http://schemas.openxmlformats.org/markup-compatibility/2006" xmlns:a14="http://schemas.microsoft.com/office/drawing/2010/main">
+        <mc:Choice Requires="a14">
           <p:sp>
             <p:nvSpPr>
               <p:cNvPr id="4" name="TextBox 3">
@@ -10547,7 +10547,7 @@
             </p:txBody>
           </p:sp>
         </mc:Choice>
-        <mc:Fallback>
+        <mc:Fallback xmlns="">
           <p:sp>
             <p:nvSpPr>
               <p:cNvPr id="4" name="TextBox 3">
@@ -11393,8 +11393,8 @@
           </p:sp>
         </mc:Fallback>
       </mc:AlternateContent>
-      <mc:AlternateContent xmlns:mc="http://schemas.openxmlformats.org/markup-compatibility/2006">
-        <mc:Choice xmlns:a14="http://schemas.microsoft.com/office/drawing/2010/main" Requires="a14">
+      <mc:AlternateContent xmlns:mc="http://schemas.openxmlformats.org/markup-compatibility/2006" xmlns:a14="http://schemas.microsoft.com/office/drawing/2010/main">
+        <mc:Choice Requires="a14">
           <p:sp>
             <p:nvSpPr>
               <p:cNvPr id="9" name="TextBox 8">
@@ -11455,7 +11455,7 @@
                         <a:rPr lang="en-US" b="0" i="1" smtClean="0">
                           <a:latin typeface="Cambria Math" panose="02040503050406030204" pitchFamily="18" charset="0"/>
                         </a:rPr>
-                        <m:t>*</m:t>
+                        <m:t>∗</m:t>
                       </m:r>
                       <m:d>
                         <m:dPr>
@@ -11673,7 +11673,7 @@
             </p:txBody>
           </p:sp>
         </mc:Choice>
-        <mc:Fallback>
+        <mc:Fallback xmlns="">
           <p:sp>
             <p:nvSpPr>
               <p:cNvPr id="9" name="TextBox 8">
@@ -12451,8 +12451,8 @@
           </a:p>
         </p:txBody>
       </p:sp>
-      <mc:AlternateContent xmlns:mc="http://schemas.openxmlformats.org/markup-compatibility/2006">
-        <mc:Choice xmlns:a14="http://schemas.microsoft.com/office/drawing/2010/main" Requires="a14">
+      <mc:AlternateContent xmlns:mc="http://schemas.openxmlformats.org/markup-compatibility/2006" xmlns:a14="http://schemas.microsoft.com/office/drawing/2010/main">
+        <mc:Choice Requires="a14">
           <p:sp>
             <p:nvSpPr>
               <p:cNvPr id="3" name="Content Placeholder 2">
@@ -12580,7 +12580,7 @@
             </p:txBody>
           </p:sp>
         </mc:Choice>
-        <mc:Fallback>
+        <mc:Fallback xmlns="">
           <p:sp>
             <p:nvSpPr>
               <p:cNvPr id="3" name="Content Placeholder 2">
@@ -20353,8 +20353,8 @@
           </a:p>
         </p:txBody>
       </p:sp>
-      <mc:AlternateContent xmlns:mc="http://schemas.openxmlformats.org/markup-compatibility/2006">
-        <mc:Choice xmlns:a14="http://schemas.microsoft.com/office/drawing/2010/main" Requires="a14">
+      <mc:AlternateContent xmlns:mc="http://schemas.openxmlformats.org/markup-compatibility/2006" xmlns:a14="http://schemas.microsoft.com/office/drawing/2010/main">
+        <mc:Choice Requires="a14">
           <p:sp>
             <p:nvSpPr>
               <p:cNvPr id="3" name="Content Placeholder 2">
@@ -20521,7 +20521,7 @@
             </p:txBody>
           </p:sp>
         </mc:Choice>
-        <mc:Fallback>
+        <mc:Fallback xmlns="">
           <p:sp>
             <p:nvSpPr>
               <p:cNvPr id="3" name="Content Placeholder 2">
